--- a/Zakopane2026/start.pptx
+++ b/Zakopane2026/start.pptx
@@ -3549,7 +3549,7 @@
         </p:nvSpPr>
         <p:spPr>
           <a:xfrm>
-            <a:off x="583894" y="462963"/>
+            <a:off x="2116899" y="2907929"/>
             <a:ext cx="10642294" cy="646331"/>
           </a:xfrm>
           <a:prstGeom prst="rect">
@@ -3596,7 +3596,27 @@
                 <a:effectLst/>
                 <a:latin typeface="Times New Roman" panose="02020603050405020304" pitchFamily="18" charset="0"/>
               </a:rPr>
-              <a:t>ADVANCED NMRD DATA FITTING WITH FITTEIA AND ONEFIT-ENGINE</a:t>
+              <a:t>ADVANCED NMRD DATA </a:t>
+            </a:r>
+            <a:r>
+              <a:rPr lang="en-PT" b="1">
+                <a:solidFill>
+                  <a:srgbClr val="000000"/>
+                </a:solidFill>
+                <a:effectLst/>
+                <a:latin typeface="Times New Roman" panose="02020603050405020304" pitchFamily="18" charset="0"/>
+              </a:rPr>
+              <a:t>FITTING WITH </a:t>
+            </a:r>
+            <a:r>
+              <a:rPr lang="en-PT" b="1" dirty="0">
+                <a:solidFill>
+                  <a:srgbClr val="000000"/>
+                </a:solidFill>
+                <a:effectLst/>
+                <a:latin typeface="Times New Roman" panose="02020603050405020304" pitchFamily="18" charset="0"/>
+              </a:rPr>
+              <a:t>FITTEIA AND ONEFIT-ENGINE</a:t>
             </a:r>
             <a:endParaRPr lang="en-PT" dirty="0">
               <a:solidFill>
@@ -3622,8 +3642,8 @@
         </p:nvSpPr>
         <p:spPr>
           <a:xfrm>
-            <a:off x="649993" y="1652530"/>
-            <a:ext cx="11005853" cy="2031325"/>
+            <a:off x="2116900" y="4082579"/>
+            <a:ext cx="7930484" cy="2031325"/>
           </a:xfrm>
           <a:prstGeom prst="rect">
             <a:avLst/>
@@ -3638,7 +3658,7 @@
           <a:p>
             <a:r>
               <a:rPr lang="en-PT" dirty="0"/>
-              <a:t>#1	Confirm a model fit that was published </a:t>
+              <a:t>#1	Confirm a model fit that was published (fitteia.org)</a:t>
             </a:r>
           </a:p>
           <a:p>
@@ -3650,7 +3670,7 @@
           <a:p>
             <a:r>
               <a:rPr lang="en-PT" dirty="0"/>
-              <a:t>#2	Fit a multiexponential magnetization decay</a:t>
+              <a:t>#2	Fit a multiexponential magnetization decay (fitteia.org)</a:t>
             </a:r>
           </a:p>
           <a:p>
@@ -3665,7 +3685,7 @@
           <a:p>
             <a:r>
               <a:rPr lang="en-PT" dirty="0"/>
-              <a:t>	and estimate the best relative  amplitude </a:t>
+              <a:t>	and estimate the best relative  amplitude (OneFit-Engine)</a:t>
             </a:r>
           </a:p>
           <a:p>
@@ -3676,6 +3696,36 @@
           </a:p>
         </p:txBody>
       </p:sp>
+      <p:pic>
+        <p:nvPicPr>
+          <p:cNvPr id="9" name="Picture 8">
+            <a:extLst>
+              <a:ext uri="{FF2B5EF4-FFF2-40B4-BE49-F238E27FC236}">
+                <a16:creationId xmlns:a16="http://schemas.microsoft.com/office/drawing/2014/main" id="{C065AAE8-39B4-A74B-26DE-9D5F267CE1A4}"/>
+              </a:ext>
+            </a:extLst>
+          </p:cNvPr>
+          <p:cNvPicPr>
+            <a:picLocks noChangeAspect="1"/>
+          </p:cNvPicPr>
+          <p:nvPr/>
+        </p:nvPicPr>
+        <p:blipFill>
+          <a:blip r:embed="rId2"/>
+          <a:stretch>
+            <a:fillRect/>
+          </a:stretch>
+        </p:blipFill>
+        <p:spPr>
+          <a:xfrm>
+            <a:off x="2116899" y="216400"/>
+            <a:ext cx="6819378" cy="2439452"/>
+          </a:xfrm>
+          <a:prstGeom prst="rect">
+            <a:avLst/>
+          </a:prstGeom>
+        </p:spPr>
+      </p:pic>
     </p:spTree>
     <p:extLst>
       <p:ext uri="{BB962C8B-B14F-4D97-AF65-F5344CB8AC3E}">
@@ -3728,7 +3778,7 @@
         </p:blipFill>
         <p:spPr>
           <a:xfrm>
-            <a:off x="6329035" y="1116991"/>
+            <a:off x="6731522" y="1229726"/>
             <a:ext cx="5295900" cy="3797300"/>
           </a:xfrm>
           <a:prstGeom prst="rect">
